--- a/Curriculo/Fase3_Basico2/decks/Basico2_S06_Jay.pptx
+++ b/Curriculo/Fase3_Basico2/decks/Basico2_S06_Jay.pptx
@@ -139,7 +139,7 @@
   <p:extLst>
     <p:ext uri="{521415D9-36F7-43E2-AB2F-B90AF26B5E84}">
       <p14:sectionLst xmlns:p14="http://schemas.microsoft.com/office/powerpoint/2010/main">
-        <p14:section name="Semana 6" id="{07CE11D9-EFE3-0E71-0720-A6632DE33FA7}">
+        <p14:section name="Semana 6" id="{33EB28A2-3BE2-22D3-8D86-7687CCE0AF88}">
           <p14:sldIdLst>
             <p14:sldId id="256"/>
             <p14:sldId id="257"/>
@@ -210,7 +210,7 @@
     </p:spTree>
     <p:extLst>
       <p:ext uri="{BB962C8B-B14F-4D97-AF65-F5344CB8AC3E}">
-        <p14:creationId xmlns:p14="http://schemas.microsoft.com/office/powerpoint/2010/main" val="870208815"/>
+        <p14:creationId xmlns:p14="http://schemas.microsoft.com/office/powerpoint/2010/main" val="1328438413"/>
       </p:ext>
     </p:extLst>
   </p:cSld>
@@ -2493,7 +2493,6 @@
             <a:r>
               <a:rPr lang="en-US" dirty="0"/>
               <a:t>30 s. Anticipo del quiz 6 y el dato de la sopa: muchos no comen 미역국 antes de un examen porque es resbalosa, y en coreano 'resbalarse' en un examen es reprobar (está en el blog). Despedida: «오늘 수능 보는 학생들, 화이팅! 여러분도 화이팅! 감사합니다!» (revisar: 보는 es input tuyo; si prefieres, solo «여러분, 화이팅! 감사합니다!»). A las 22:00 en punto: 'Finalizar reunión para todos'.
-Imagen sugerida: Logo azul de Academia Seúl (plantilla)
 Fuente: Nueva
 Lámina 28</a:t>
             </a:r>
@@ -2939,7 +2938,7 @@
             <a:r>
               <a:rPr lang="en-US" dirty="0"/>
               <a:t>21:05 · 40 s. En Corea es jueves 19, las 9 de la mañana, y se rinde el 수능, el examen de ingreso a la universidad; en este momento corre la primera prueba, que es de coreano, 국어 (revisar: confirma el horario 2026 en kice.re.kr). A quien va a rendir un examen se le dice 시험 잘 보세요!: solo para reconocer. Guiño de 10 s: «¿Se acuerdan de la sopa del cumpleaños, 미역국? Hoy muchos no la comen; se los cuento al final… o lo leen en el blog.» Si preguntan por los aviones: una línea y sigues.
-Imagen sugerida: Foto con licencia libre de un centro de examen o de padres esperando afuera el día del 수능, sin caras de menores identificables
+Imagen: incluida (dibujo de la casa).
 Fuente: Nueva
 Lámina 5</a:t>
             </a:r>
@@ -3118,7 +3117,7 @@
             <a:r>
               <a:rPr lang="en-US" dirty="0"/>
               <a:t>21:06 · 1 min. Dices cada frase dos veces, con gesto, sin traducir; ellos escriben en el chat qué entendieron. Las frases aparecen con clic y confirmas lo que escribieron. «Hoy son tres piezas: dos 'no' distintos, 안 y 못, y un 'sí puedo': 할 수 있어요.» Revisar: si alguna no es verdad para ti, cambia el verbo, no la estructura.
-Imagen sugerida: 3 fotos de Jay: un cartel de 'no fumar' o Jay con un café · Jay bailando en un matrimonio (foto o GIF) · Jay manejando
+Imagen: incluida (dibujo de la casa).
 Fuente: Nueva (fotos de Jay)
 Lámina 7</a:t>
             </a:r>
@@ -4377,7 +4376,7 @@
                 <a:ea typeface="Malgun Gothic" pitchFamily="34" charset="-122"/>
                 <a:cs typeface="Malgun Gothic" pitchFamily="34" charset="-120"/>
               </a:rPr>
-              <a:t>할 수 있어요</a:t>
+              <a:t>할 수 있어요</a:t>
             </a:r>
             <a:endParaRPr lang="en-US" sz="2200" dirty="0"/>
           </a:p>
@@ -4507,7 +4506,7 @@
         <p:spPr>
           <a:xfrm>
             <a:off x="548640" y="1325880"/>
-            <a:ext cx="11064240" cy="457200"/>
+            <a:ext cx="11091672" cy="457200"/>
           </a:xfrm>
           <a:prstGeom prst="rect">
             <a:avLst/>
@@ -5192,8 +5191,8 @@
         </p:nvSpPr>
         <p:spPr>
           <a:xfrm>
-            <a:off x="1463040" y="3657600"/>
-            <a:ext cx="9262872" cy="822960"/>
+            <a:off x="1783080" y="3657600"/>
+            <a:ext cx="8439912" cy="822960"/>
           </a:xfrm>
           <a:prstGeom prst="rect">
             <a:avLst/>
@@ -5408,7 +5407,7 @@
         <p:spPr>
           <a:xfrm>
             <a:off x="548640" y="1325880"/>
-            <a:ext cx="11064240" cy="457200"/>
+            <a:ext cx="11091672" cy="457200"/>
           </a:xfrm>
           <a:prstGeom prst="rect">
             <a:avLst/>
@@ -5533,7 +5532,7 @@
           <p:nvPr>
             <p:extLst>
               <p:ext uri="{D42A27DB-BD31-4B8C-83A1-F6EECF244321}">
-                <p14:modId xmlns:p14="http://schemas.microsoft.com/office/powerpoint/2010/main" val="4242634101"/>
+                <p14:modId xmlns:p14="http://schemas.microsoft.com/office/powerpoint/2010/main" val="3635420915"/>
               </p:ext>
             </p:extLst>
           </p:nvPr>
@@ -6722,7 +6721,7 @@
               <a:buChar char="•"/>
             </a:pPr>
             <a:r>
-              <a:rPr lang="ko-KR" altLang="en-US" sz="2400" dirty="0">
+              <a:rPr lang="ko-KR" altLang="en-US" sz="2800" dirty="0">
                 <a:solidFill>
                   <a:srgbClr val="14142B"/>
                 </a:solidFill>
@@ -6733,14 +6732,14 @@
               <a:t>못 가요</a:t>
             </a:r>
             <a:r>
-              <a:rPr lang="en-US" sz="2400" dirty="0">
+              <a:rPr lang="en-US" sz="2800" dirty="0">
                 <a:solidFill>
                   <a:srgbClr val="14142B"/>
                 </a:solidFill>
               </a:rPr>
               <a:t>. — No puedo ir.</a:t>
             </a:r>
-            <a:endParaRPr lang="en-US" sz="2400" dirty="0"/>
+            <a:endParaRPr lang="en-US" sz="2800" dirty="0"/>
           </a:p>
           <a:p>
             <a:pPr marL="228600" indent="-228600" eaLnBrk="1">
@@ -6751,7 +6750,7 @@
               <a:buChar char="•"/>
             </a:pPr>
             <a:r>
-              <a:rPr lang="ko-KR" altLang="en-US" sz="2400" dirty="0">
+              <a:rPr lang="ko-KR" altLang="en-US" sz="2800" dirty="0">
                 <a:solidFill>
                   <a:srgbClr val="14142B"/>
                 </a:solidFill>
@@ -6762,14 +6761,14 @@
               <a:t>수영 못 해요</a:t>
             </a:r>
             <a:r>
-              <a:rPr lang="en-US" sz="2400" dirty="0">
+              <a:rPr lang="en-US" sz="2800" dirty="0">
                 <a:solidFill>
                   <a:srgbClr val="14142B"/>
                 </a:solidFill>
               </a:rPr>
               <a:t>. — No sé nadar.</a:t>
             </a:r>
-            <a:endParaRPr lang="en-US" sz="2400" dirty="0"/>
+            <a:endParaRPr lang="en-US" sz="2800" dirty="0"/>
           </a:p>
           <a:p>
             <a:pPr marL="228600" indent="-228600" eaLnBrk="1">
@@ -6780,7 +6779,7 @@
               <a:buChar char="•"/>
             </a:pPr>
             <a:r>
-              <a:rPr lang="ko-KR" altLang="en-US" sz="2400" dirty="0">
+              <a:rPr lang="ko-KR" altLang="en-US" sz="2800" dirty="0">
                 <a:solidFill>
                   <a:srgbClr val="14142B"/>
                 </a:solidFill>
@@ -6791,14 +6790,14 @@
               <a:t>매운 음식을 잘 못 먹어요</a:t>
             </a:r>
             <a:r>
-              <a:rPr lang="en-US" sz="2400" dirty="0">
+              <a:rPr lang="en-US" sz="2800" dirty="0">
                 <a:solidFill>
                   <a:srgbClr val="14142B"/>
                 </a:solidFill>
               </a:rPr>
               <a:t>. — No aguanto mucho el picante.</a:t>
             </a:r>
-            <a:endParaRPr lang="en-US" sz="2400" dirty="0"/>
+            <a:endParaRPr lang="en-US" sz="2800" dirty="0"/>
           </a:p>
           <a:p>
             <a:pPr marL="228600" indent="-228600" eaLnBrk="1">
@@ -6809,7 +6808,7 @@
               <a:buChar char="•"/>
             </a:pPr>
             <a:r>
-              <a:rPr lang="ko-KR" altLang="en-US" sz="2400" dirty="0">
+              <a:rPr lang="ko-KR" altLang="en-US" sz="2800" dirty="0">
                 <a:solidFill>
                   <a:srgbClr val="14142B"/>
                 </a:solidFill>
@@ -6820,7 +6819,7 @@
               <a:t>Va donde va 안</a:t>
             </a:r>
             <a:r>
-              <a:rPr lang="en-US" sz="2400" dirty="0">
+              <a:rPr lang="en-US" sz="2800" dirty="0">
                 <a:solidFill>
                   <a:srgbClr val="14142B"/>
                 </a:solidFill>
@@ -6828,7 +6827,7 @@
               <a:t>: delante del verbo y al medio con los verbos de </a:t>
             </a:r>
             <a:r>
-              <a:rPr lang="ko-KR" altLang="en-US" sz="2400" dirty="0">
+              <a:rPr lang="ko-KR" altLang="en-US" sz="2800" dirty="0">
                 <a:solidFill>
                   <a:srgbClr val="14142B"/>
                 </a:solidFill>
@@ -6838,7 +6837,7 @@
               </a:rPr>
               <a:t>하다</a:t>
             </a:r>
-            <a:endParaRPr lang="en-US" sz="2400" dirty="0"/>
+            <a:endParaRPr lang="en-US" sz="2800" dirty="0"/>
           </a:p>
         </p:txBody>
       </p:sp>
@@ -7070,7 +7069,7 @@
         <p:spPr>
           <a:xfrm>
             <a:off x="548640" y="1325880"/>
-            <a:ext cx="11064240" cy="457200"/>
+            <a:ext cx="11091672" cy="457200"/>
           </a:xfrm>
           <a:prstGeom prst="rect">
             <a:avLst/>
@@ -7651,7 +7650,7 @@
         <p:spPr>
           <a:xfrm>
             <a:off x="548640" y="1325880"/>
-            <a:ext cx="11064240" cy="548640"/>
+            <a:ext cx="11091672" cy="548640"/>
           </a:xfrm>
           <a:prstGeom prst="rect">
             <a:avLst/>
@@ -9068,7 +9067,7 @@
         <p:spPr>
           <a:xfrm>
             <a:off x="548640" y="1325880"/>
-            <a:ext cx="11064240" cy="548640"/>
+            <a:ext cx="11091672" cy="548640"/>
           </a:xfrm>
           <a:prstGeom prst="rect">
             <a:avLst/>
@@ -10496,7 +10495,7 @@
         <p:spPr>
           <a:xfrm>
             <a:off x="548640" y="1325880"/>
-            <a:ext cx="11064240" cy="457200"/>
+            <a:ext cx="11091672" cy="457200"/>
           </a:xfrm>
           <a:prstGeom prst="rect">
             <a:avLst/>
@@ -10594,7 +10593,7 @@
           <p:nvPr>
             <p:extLst>
               <p:ext uri="{D42A27DB-BD31-4B8C-83A1-F6EECF244321}">
-                <p14:modId xmlns:p14="http://schemas.microsoft.com/office/powerpoint/2010/main" val="80350563"/>
+                <p14:modId xmlns:p14="http://schemas.microsoft.com/office/powerpoint/2010/main" val="1877885623"/>
               </p:ext>
             </p:extLst>
           </p:nvPr>
@@ -11404,7 +11403,7 @@
                           <a:ea typeface="Malgun Gothic" pitchFamily="34" charset="-122"/>
                           <a:cs typeface="Malgun Gothic" pitchFamily="34" charset="-120"/>
                         </a:rPr>
-                        <a:t>ㄱ ㄷ ㅂ ㅅ ㅈ</a:t>
+                        <a:t>ㄱ ㄷ ㅂ ㅅ ㅈ</a:t>
                       </a:r>
                       <a:endParaRPr lang="en-US" sz="1200" dirty="0"/>
                     </a:p>
@@ -11829,7 +11828,7 @@
                 <a:ea typeface="Malgun Gothic" pitchFamily="34" charset="-122"/>
                 <a:cs typeface="Malgun Gothic" pitchFamily="34" charset="-120"/>
               </a:rPr>
-              <a:t>ㄹ 수 있어요 </a:t>
+              <a:t>ㄹ 수 있어요 </a:t>
             </a:r>
             <a:r>
               <a:rPr lang="en-US" sz="3000" b="1" dirty="0">
@@ -11860,7 +11859,7 @@
         <p:spPr>
           <a:xfrm>
             <a:off x="548640" y="1325880"/>
-            <a:ext cx="11064240" cy="457200"/>
+            <a:ext cx="11091672" cy="457200"/>
           </a:xfrm>
           <a:prstGeom prst="rect">
             <a:avLst/>
@@ -11985,7 +11984,7 @@
           <p:nvPr>
             <p:extLst>
               <p:ext uri="{D42A27DB-BD31-4B8C-83A1-F6EECF244321}">
-                <p14:modId xmlns:p14="http://schemas.microsoft.com/office/powerpoint/2010/main" val="2828179479"/>
+                <p14:modId xmlns:p14="http://schemas.microsoft.com/office/powerpoint/2010/main" val="1260399267"/>
               </p:ext>
             </p:extLst>
           </p:nvPr>
@@ -12290,7 +12289,7 @@
                           <a:ea typeface="Malgun Gothic" pitchFamily="34" charset="-122"/>
                           <a:cs typeface="Malgun Gothic" pitchFamily="34" charset="-120"/>
                         </a:rPr>
-                        <a:t>-ㄹ 수 있어요</a:t>
+                        <a:t>-ㄹ 수 있어요</a:t>
                       </a:r>
                       <a:endParaRPr lang="en-US" sz="1200" dirty="0"/>
                     </a:p>
@@ -12354,7 +12353,7 @@
                           <a:ea typeface="Malgun Gothic" pitchFamily="34" charset="-122"/>
                           <a:cs typeface="Malgun Gothic" pitchFamily="34" charset="-120"/>
                         </a:rPr>
-                        <a:t>할 수 있어요 </a:t>
+                        <a:t>할 수 있어요 </a:t>
                       </a:r>
                       <a:r>
                         <a:rPr lang="en-US" sz="1800" dirty="0">
@@ -12373,7 +12372,7 @@
                           <a:ea typeface="Malgun Gothic" pitchFamily="34" charset="-122"/>
                           <a:cs typeface="Malgun Gothic" pitchFamily="34" charset="-120"/>
                         </a:rPr>
-                        <a:t>갈 수 있어요</a:t>
+                        <a:t>갈 수 있어요</a:t>
                       </a:r>
                       <a:endParaRPr lang="en-US" sz="1200" dirty="0"/>
                     </a:p>
@@ -12505,7 +12504,7 @@
                           <a:ea typeface="Malgun Gothic" pitchFamily="34" charset="-122"/>
                           <a:cs typeface="Malgun Gothic" pitchFamily="34" charset="-120"/>
                         </a:rPr>
-                        <a:t>-을 수 있어요</a:t>
+                        <a:t>-을 수 있어요</a:t>
                       </a:r>
                       <a:endParaRPr lang="en-US" sz="1200" dirty="0"/>
                     </a:p>
@@ -12569,7 +12568,7 @@
                           <a:ea typeface="Malgun Gothic" pitchFamily="34" charset="-122"/>
                           <a:cs typeface="Malgun Gothic" pitchFamily="34" charset="-120"/>
                         </a:rPr>
-                        <a:t>먹을 수 있어요</a:t>
+                        <a:t>먹을 수 있어요</a:t>
                       </a:r>
                       <a:endParaRPr lang="en-US" sz="1200" dirty="0"/>
                     </a:p>
@@ -12765,7 +12764,7 @@
                           <a:ea typeface="Malgun Gothic" pitchFamily="34" charset="-122"/>
                           <a:cs typeface="Malgun Gothic" pitchFamily="34" charset="-120"/>
                         </a:rPr>
-                        <a:t>놀 수 있어요</a:t>
+                        <a:t>놀 수 있어요</a:t>
                       </a:r>
                       <a:endParaRPr lang="en-US" sz="1200" dirty="0"/>
                     </a:p>
@@ -13029,7 +13028,7 @@
                           <a:ea typeface="Malgun Gothic" pitchFamily="34" charset="-122"/>
                           <a:cs typeface="Malgun Gothic" pitchFamily="34" charset="-120"/>
                         </a:rPr>
-                        <a:t>들을 수 있어요</a:t>
+                        <a:t>들을 수 있어요</a:t>
                       </a:r>
                       <a:endParaRPr lang="en-US" sz="1200" dirty="0"/>
                     </a:p>
@@ -13244,7 +13243,7 @@
                           <a:ea typeface="Malgun Gothic" pitchFamily="34" charset="-122"/>
                           <a:cs typeface="Malgun Gothic" pitchFamily="34" charset="-120"/>
                         </a:rPr>
-                        <a:t>할 수 없어요 </a:t>
+                        <a:t>할 수 없어요 </a:t>
                       </a:r>
                       <a:r>
                         <a:rPr lang="en-US" sz="1800" dirty="0">
@@ -13438,7 +13437,7 @@
                 <a:ea typeface="Malgun Gothic" pitchFamily="34" charset="-122"/>
                 <a:cs typeface="Malgun Gothic" pitchFamily="34" charset="-120"/>
               </a:rPr>
-              <a:t>저는 한글을 읽을 수 있어요</a:t>
+              <a:t>저는 한글을 읽을 수 있어요</a:t>
             </a:r>
             <a:r>
               <a:rPr lang="en-US" sz="2200" b="1" dirty="0">
@@ -13541,7 +13540,7 @@
                 <a:ea typeface="Malgun Gothic" pitchFamily="34" charset="-122"/>
                 <a:cs typeface="Malgun Gothic" pitchFamily="34" charset="-120"/>
               </a:rPr>
-              <a:t>저는 한글을 읽을 수 있어요</a:t>
+              <a:t>저는 한글을 읽을 수 있어요</a:t>
             </a:r>
             <a:r>
               <a:rPr lang="en-US" sz="5100" b="1" dirty="0">
@@ -13563,8 +13562,8 @@
         </p:nvSpPr>
         <p:spPr>
           <a:xfrm>
-            <a:off x="1463040" y="3657600"/>
-            <a:ext cx="9262872" cy="822960"/>
+            <a:off x="1783080" y="3657600"/>
+            <a:ext cx="8439912" cy="822960"/>
           </a:xfrm>
           <a:prstGeom prst="rect">
             <a:avLst/>
@@ -13681,7 +13680,7 @@
                 <a:ea typeface="Malgun Gothic" pitchFamily="34" charset="-122"/>
                 <a:cs typeface="Malgun Gothic" pitchFamily="34" charset="-120"/>
               </a:rPr>
-              <a:t>할 수 있어요</a:t>
+              <a:t>할 수 있어요</a:t>
             </a:r>
             <a:r>
               <a:rPr lang="en-US" sz="1800" dirty="0">
@@ -13844,7 +13843,7 @@
         <p:spPr>
           <a:xfrm>
             <a:off x="548640" y="1325880"/>
-            <a:ext cx="11064240" cy="548640"/>
+            <a:ext cx="11091672" cy="548640"/>
           </a:xfrm>
           <a:prstGeom prst="rect">
             <a:avLst/>
@@ -15221,7 +15220,7 @@
                 <a:ea typeface="Malgun Gothic" pitchFamily="34" charset="-122"/>
                 <a:cs typeface="Malgun Gothic" pitchFamily="34" charset="-120"/>
               </a:rPr>
-              <a:t>수영할 수 있어요</a:t>
+              <a:t>수영할 수 있어요</a:t>
             </a:r>
             <a:r>
               <a:rPr lang="en-US" sz="2400" dirty="0">
@@ -15269,7 +15268,7 @@
                 <a:ea typeface="Malgun Gothic" pitchFamily="34" charset="-122"/>
                 <a:cs typeface="Malgun Gothic" pitchFamily="34" charset="-120"/>
               </a:rPr>
-              <a:t>할 수 있어요</a:t>
+              <a:t>할 수 있어요</a:t>
             </a:r>
             <a:r>
               <a:rPr lang="en-US" sz="2400" dirty="0">
@@ -15298,7 +15297,7 @@
                 <a:ea typeface="Malgun Gothic" pitchFamily="34" charset="-122"/>
                 <a:cs typeface="Malgun Gothic" pitchFamily="34" charset="-120"/>
               </a:rPr>
-              <a:t>조금 할 수 있어요</a:t>
+              <a:t>조금 할 수 있어요</a:t>
             </a:r>
             <a:r>
               <a:rPr lang="en-US" sz="2400" dirty="0">
@@ -15423,7 +15422,7 @@
                 <a:ea typeface="Malgun Gothic" pitchFamily="34" charset="-122"/>
                 <a:cs typeface="Malgun Gothic" pitchFamily="34" charset="-120"/>
               </a:rPr>
-              <a:t>할 수 없어요 </a:t>
+              <a:t>할 수 없어요 </a:t>
             </a:r>
             <a:r>
               <a:rPr lang="en-US" sz="2400" dirty="0">
@@ -15637,7 +15636,7 @@
         <p:spPr>
           <a:xfrm>
             <a:off x="548640" y="1325880"/>
-            <a:ext cx="11064240" cy="457200"/>
+            <a:ext cx="11091672" cy="457200"/>
           </a:xfrm>
           <a:prstGeom prst="rect">
             <a:avLst/>
@@ -15762,7 +15761,7 @@
           <p:nvPr>
             <p:extLst>
               <p:ext uri="{D42A27DB-BD31-4B8C-83A1-F6EECF244321}">
-                <p14:modId xmlns:p14="http://schemas.microsoft.com/office/powerpoint/2010/main" val="1631617365"/>
+                <p14:modId xmlns:p14="http://schemas.microsoft.com/office/powerpoint/2010/main" val="3133859185"/>
               </p:ext>
             </p:extLst>
           </p:nvPr>
@@ -17072,8 +17071,8 @@
         </p:nvSpPr>
         <p:spPr>
           <a:xfrm>
-            <a:off x="1463040" y="3657600"/>
-            <a:ext cx="9262872" cy="822960"/>
+            <a:off x="1783080" y="3657600"/>
+            <a:ext cx="8439912" cy="822960"/>
           </a:xfrm>
           <a:prstGeom prst="rect">
             <a:avLst/>
@@ -17315,7 +17314,7 @@
         <p:spPr>
           <a:xfrm>
             <a:off x="548640" y="1325880"/>
-            <a:ext cx="11064240" cy="457200"/>
+            <a:ext cx="11091672" cy="457200"/>
           </a:xfrm>
           <a:prstGeom prst="rect">
             <a:avLst/>
@@ -17383,7 +17382,7 @@
           <p:nvPr>
             <p:extLst>
               <p:ext uri="{D42A27DB-BD31-4B8C-83A1-F6EECF244321}">
-                <p14:modId xmlns:p14="http://schemas.microsoft.com/office/powerpoint/2010/main" val="2458162084"/>
+                <p14:modId xmlns:p14="http://schemas.microsoft.com/office/powerpoint/2010/main" val="709116831"/>
               </p:ext>
             </p:extLst>
           </p:nvPr>
@@ -18123,7 +18122,7 @@
                           <a:ea typeface="Malgun Gothic" pitchFamily="34" charset="-122"/>
                           <a:cs typeface="Malgun Gothic" pitchFamily="34" charset="-120"/>
                         </a:rPr>
-                        <a:t>금요일은 갈 수 있어요</a:t>
+                        <a:t>금요일은 갈 수 있어요</a:t>
                       </a:r>
                       <a:r>
                         <a:rPr lang="en-US" sz="1800" dirty="0">
@@ -18304,7 +18303,7 @@
                           <a:ea typeface="Malgun Gothic" pitchFamily="34" charset="-122"/>
                           <a:cs typeface="Malgun Gothic" pitchFamily="34" charset="-120"/>
                         </a:rPr>
-                        <a:t>매운 음식을 먹을 수 있어요</a:t>
+                        <a:t>매운 음식을 먹을 수 있어요</a:t>
                       </a:r>
                       <a:r>
                         <a:rPr lang="en-US" sz="1800" dirty="0">
@@ -18510,7 +18509,7 @@
         <p:spPr>
           <a:xfrm>
             <a:off x="548640" y="1325880"/>
-            <a:ext cx="11064240" cy="457200"/>
+            <a:ext cx="11091672" cy="457200"/>
           </a:xfrm>
           <a:prstGeom prst="rect">
             <a:avLst/>
@@ -18616,7 +18615,7 @@
           <p:nvPr>
             <p:extLst>
               <p:ext uri="{D42A27DB-BD31-4B8C-83A1-F6EECF244321}">
-                <p14:modId xmlns:p14="http://schemas.microsoft.com/office/powerpoint/2010/main" val="1528702765"/>
+                <p14:modId xmlns:p14="http://schemas.microsoft.com/office/powerpoint/2010/main" val="2634971654"/>
               </p:ext>
             </p:extLst>
           </p:nvPr>
@@ -19232,7 +19231,7 @@
                           <a:ea typeface="Malgun Gothic" pitchFamily="34" charset="-122"/>
                           <a:cs typeface="Malgun Gothic" pitchFamily="34" charset="-120"/>
                         </a:rPr>
-                        <a:t>금요일 일곱 시에 식당 앞에서 만나요</a:t>
+                        <a:t>금요일 일곱 시에 식당 앞에서 만나요</a:t>
                       </a:r>
                       <a:r>
                         <a:rPr lang="en-US" sz="1800" dirty="0">
@@ -19630,7 +19629,7 @@
                 <a:ea typeface="Malgun Gothic" pitchFamily="34" charset="-122"/>
                 <a:cs typeface="Malgun Gothic" pitchFamily="34" charset="-120"/>
               </a:rPr>
-              <a:t>운전은 할 수 있지만 수영은 못 해요</a:t>
+              <a:t>운전은 할 수 있지만 수영은 못 해요</a:t>
             </a:r>
             <a:r>
               <a:rPr lang="en-US" sz="2400" dirty="0">
@@ -19659,7 +19658,7 @@
                 <a:ea typeface="Malgun Gothic" pitchFamily="34" charset="-122"/>
                 <a:cs typeface="Malgun Gothic" pitchFamily="34" charset="-120"/>
               </a:rPr>
-              <a:t>기타는 못 치지만 노래는 할 수 있어요</a:t>
+              <a:t>기타는 못 치지만 노래는 할 수 있어요</a:t>
             </a:r>
             <a:r>
               <a:rPr lang="en-US" sz="2400" dirty="0">
@@ -19793,7 +19792,7 @@
                 <a:ea typeface="Malgun Gothic" pitchFamily="34" charset="-122"/>
                 <a:cs typeface="Malgun Gothic" pitchFamily="34" charset="-120"/>
               </a:rPr>
-              <a:t>는 할 수 있지만 </a:t>
+              <a:t>는 할 수 있지만 </a:t>
             </a:r>
             <a:r>
               <a:rPr lang="en-US" sz="2400" dirty="0">
@@ -20444,7 +20443,7 @@
                 <a:ea typeface="Malgun Gothic" pitchFamily="34" charset="-122"/>
                 <a:cs typeface="Malgun Gothic" pitchFamily="34" charset="-120"/>
               </a:rPr>
-              <a:t>할 수 있어요</a:t>
+              <a:t>할 수 있어요</a:t>
             </a:r>
             <a:r>
               <a:rPr lang="en-US" sz="2200" dirty="0">
@@ -20781,7 +20780,7 @@
                 <a:ea typeface="Malgun Gothic" pitchFamily="34" charset="-122"/>
                 <a:cs typeface="Malgun Gothic" pitchFamily="34" charset="-120"/>
               </a:rPr>
-              <a:t>할 수 없어요</a:t>
+              <a:t>할 수 없어요</a:t>
             </a:r>
             <a:r>
               <a:rPr lang="en-US" sz="2000" dirty="0">
@@ -20877,7 +20876,7 @@
                 <a:ea typeface="Malgun Gothic" pitchFamily="34" charset="-122"/>
                 <a:cs typeface="Malgun Gothic" pitchFamily="34" charset="-120"/>
               </a:rPr>
-              <a:t>Minuto libre · 21:51 · 뭐 할 수 있어요</a:t>
+              <a:t>Minuto libre · 21:51 · 뭐 할 수 있어요</a:t>
             </a:r>
             <a:r>
               <a:rPr lang="en-US" sz="2000" dirty="0">
@@ -21127,7 +21126,7 @@
         <p:spPr>
           <a:xfrm>
             <a:off x="548640" y="1325880"/>
-            <a:ext cx="11064240" cy="457200"/>
+            <a:ext cx="11091672" cy="457200"/>
           </a:xfrm>
           <a:prstGeom prst="rect">
             <a:avLst/>
@@ -21165,7 +21164,7 @@
           <p:nvPr>
             <p:extLst>
               <p:ext uri="{D42A27DB-BD31-4B8C-83A1-F6EECF244321}">
-                <p14:modId xmlns:p14="http://schemas.microsoft.com/office/powerpoint/2010/main" val="4255964318"/>
+                <p14:modId xmlns:p14="http://schemas.microsoft.com/office/powerpoint/2010/main" val="371800949"/>
               </p:ext>
             </p:extLst>
           </p:nvPr>
@@ -21976,7 +21975,7 @@
               <a:buChar char="•"/>
             </a:pPr>
             <a:r>
-              <a:rPr lang="ko-KR" altLang="en-US" sz="2400" dirty="0">
+              <a:rPr lang="ko-KR" altLang="en-US" sz="2800" dirty="0">
                 <a:solidFill>
                   <a:srgbClr val="14142B"/>
                 </a:solidFill>
@@ -21984,17 +21983,17 @@
                 <a:ea typeface="Malgun Gothic" pitchFamily="34" charset="-122"/>
                 <a:cs typeface="Malgun Gothic" pitchFamily="34" charset="-120"/>
               </a:rPr>
-              <a:t>수영할 수 있어요</a:t>
-            </a:r>
-            <a:r>
-              <a:rPr lang="en-US" sz="2400" dirty="0">
+              <a:t>수영할 수 있어요</a:t>
+            </a:r>
+            <a:r>
+              <a:rPr lang="en-US" sz="2800" dirty="0">
                 <a:solidFill>
                   <a:srgbClr val="14142B"/>
                 </a:solidFill>
               </a:rPr>
               <a:t>? — ¿Sabes nadar?</a:t>
             </a:r>
-            <a:endParaRPr lang="en-US" sz="2400" dirty="0"/>
+            <a:endParaRPr lang="en-US" sz="2800" dirty="0"/>
           </a:p>
           <a:p>
             <a:pPr marL="228600" indent="-228600" eaLnBrk="1">
@@ -22005,7 +22004,7 @@
               <a:buChar char="•"/>
             </a:pPr>
             <a:r>
-              <a:rPr lang="ko-KR" altLang="en-US" sz="2400" dirty="0">
+              <a:rPr lang="ko-KR" altLang="en-US" sz="2800" dirty="0">
                 <a:solidFill>
                   <a:srgbClr val="14142B"/>
                 </a:solidFill>
@@ -22016,7 +22015,7 @@
               <a:t>미안해요</a:t>
             </a:r>
             <a:r>
-              <a:rPr lang="en-US" sz="2400" dirty="0">
+              <a:rPr lang="en-US" sz="2800" dirty="0">
                 <a:solidFill>
                   <a:srgbClr val="14142B"/>
                 </a:solidFill>
@@ -22024,7 +22023,7 @@
               <a:t>, </a:t>
             </a:r>
             <a:r>
-              <a:rPr lang="ko-KR" altLang="en-US" sz="2400" dirty="0">
+              <a:rPr lang="ko-KR" altLang="en-US" sz="2800" dirty="0">
                 <a:solidFill>
                   <a:srgbClr val="14142B"/>
                 </a:solidFill>
@@ -22035,14 +22034,14 @@
               <a:t>내일은 못 가요</a:t>
             </a:r>
             <a:r>
-              <a:rPr lang="en-US" sz="2400" dirty="0">
+              <a:rPr lang="en-US" sz="2800" dirty="0">
                 <a:solidFill>
                   <a:srgbClr val="14142B"/>
                 </a:solidFill>
               </a:rPr>
               <a:t>. — Perdón, mañana no puedo ir.</a:t>
             </a:r>
-            <a:endParaRPr lang="en-US" sz="2400" dirty="0"/>
+            <a:endParaRPr lang="en-US" sz="2800" dirty="0"/>
           </a:p>
           <a:p>
             <a:pPr marL="228600" indent="-228600" eaLnBrk="1">
@@ -22053,7 +22052,7 @@
               <a:buChar char="•"/>
             </a:pPr>
             <a:r>
-              <a:rPr lang="ko-KR" altLang="en-US" sz="2400" dirty="0">
+              <a:rPr lang="ko-KR" altLang="en-US" sz="2800" dirty="0">
                 <a:solidFill>
                   <a:srgbClr val="14142B"/>
                 </a:solidFill>
@@ -22064,14 +22063,14 @@
               <a:t>다음에 같이 가요</a:t>
             </a:r>
             <a:r>
-              <a:rPr lang="en-US" sz="2400" dirty="0">
+              <a:rPr lang="en-US" sz="2800" dirty="0">
                 <a:solidFill>
                   <a:srgbClr val="14142B"/>
                 </a:solidFill>
               </a:rPr>
               <a:t>! — ¡Vamos la próxima!</a:t>
             </a:r>
-            <a:endParaRPr lang="en-US" sz="2400" dirty="0"/>
+            <a:endParaRPr lang="en-US" sz="2800" dirty="0"/>
           </a:p>
         </p:txBody>
       </p:sp>
@@ -22275,7 +22274,7 @@
         <p:spPr>
           <a:xfrm>
             <a:off x="548640" y="1325880"/>
-            <a:ext cx="11064240" cy="548640"/>
+            <a:ext cx="11091672" cy="548640"/>
           </a:xfrm>
           <a:prstGeom prst="rect">
             <a:avLst/>
@@ -22380,7 +22379,7 @@
         </p:nvSpPr>
         <p:spPr>
           <a:xfrm>
-            <a:off x="548640" y="2171700"/>
+            <a:off x="548640" y="3236976"/>
             <a:ext cx="457200" cy="457200"/>
           </a:xfrm>
           <a:prstGeom prst="ellipse">
@@ -22405,7 +22404,7 @@
         </p:nvSpPr>
         <p:spPr>
           <a:xfrm>
-            <a:off x="548640" y="2171700"/>
+            <a:off x="548640" y="3236976"/>
             <a:ext cx="457200" cy="457200"/>
           </a:xfrm>
           <a:prstGeom prst="rect">
@@ -22443,8 +22442,8 @@
         </p:nvSpPr>
         <p:spPr>
           <a:xfrm>
-            <a:off x="1188720" y="1965960"/>
-            <a:ext cx="6080760" cy="868680"/>
+            <a:off x="1188720" y="2871216"/>
+            <a:ext cx="6080760" cy="1188720"/>
           </a:xfrm>
           <a:prstGeom prst="rect">
             <a:avLst/>
@@ -22560,12 +22559,12 @@
         </p:nvSpPr>
         <p:spPr>
           <a:xfrm>
-            <a:off x="7498080" y="2002536"/>
-            <a:ext cx="4142232" cy="795528"/>
+            <a:off x="7498080" y="2907792"/>
+            <a:ext cx="4142232" cy="1115568"/>
           </a:xfrm>
           <a:prstGeom prst="roundRect">
             <a:avLst>
-              <a:gd name="adj" fmla="val 13793"/>
+              <a:gd name="adj" fmla="val 9836"/>
             </a:avLst>
           </a:prstGeom>
           <a:solidFill>
@@ -22587,8 +22586,8 @@
         </p:nvSpPr>
         <p:spPr>
           <a:xfrm>
-            <a:off x="7589520" y="2002536"/>
-            <a:ext cx="3959352" cy="795528"/>
+            <a:off x="7589520" y="2907792"/>
+            <a:ext cx="3959352" cy="1115568"/>
           </a:xfrm>
           <a:prstGeom prst="rect">
             <a:avLst/>
@@ -22970,7 +22969,7 @@
                 <a:ea typeface="Malgun Gothic" pitchFamily="34" charset="-122"/>
                 <a:cs typeface="Malgun Gothic" pitchFamily="34" charset="-120"/>
               </a:rPr>
-              <a:t>3 · Audio de 40 s: 할 수 있어요</a:t>
+              <a:t>3 · Audio de 40 s: 할 수 있어요</a:t>
             </a:r>
             <a:r>
               <a:rPr lang="en-US" sz="2000" dirty="0">
@@ -23394,7 +23393,7 @@
                 <a:ea typeface="Malgun Gothic" pitchFamily="34" charset="-122"/>
                 <a:cs typeface="Malgun Gothic" pitchFamily="34" charset="-120"/>
               </a:rPr>
-              <a:t>할 수 있어요 </a:t>
+              <a:t>할 수 있어요 </a:t>
             </a:r>
             <a:r>
               <a:rPr lang="en-US" sz="2200" dirty="0">
@@ -23504,7 +23503,7 @@
         <p:spPr>
           <a:xfrm>
             <a:off x="548640" y="1325880"/>
-            <a:ext cx="11064240" cy="457200"/>
+            <a:ext cx="11091672" cy="457200"/>
           </a:xfrm>
           <a:prstGeom prst="rect">
             <a:avLst/>
@@ -23530,7 +23529,7 @@
                 <a:ea typeface="Malgun Gothic" pitchFamily="34" charset="-122"/>
                 <a:cs typeface="Malgun Gothic" pitchFamily="34" charset="-120"/>
               </a:rPr>
-              <a:t>기타를 칠 수 있어요</a:t>
+              <a:t>기타를 칠 수 있어요</a:t>
             </a:r>
             <a:r>
               <a:rPr lang="en-US" sz="1800" i="1" dirty="0">
@@ -23568,7 +23567,7 @@
                 <a:ea typeface="Malgun Gothic" pitchFamily="34" charset="-122"/>
                 <a:cs typeface="Malgun Gothic" pitchFamily="34" charset="-120"/>
               </a:rPr>
-              <a:t>한 명</a:t>
+              <a:t>한 명</a:t>
             </a:r>
             <a:r>
               <a:rPr lang="en-US" sz="1800" i="1" dirty="0">
@@ -23587,7 +23586,7 @@
                 <a:ea typeface="Malgun Gothic" pitchFamily="34" charset="-122"/>
                 <a:cs typeface="Malgun Gothic" pitchFamily="34" charset="-120"/>
               </a:rPr>
-              <a:t>두 명</a:t>
+              <a:t>두 명</a:t>
             </a:r>
             <a:r>
               <a:rPr lang="en-US" sz="1800" i="1" dirty="0">
@@ -23696,7 +23695,7 @@
         <p:spPr>
           <a:xfrm>
             <a:off x="621792" y="2920136"/>
-            <a:ext cx="3398520" cy="577444"/>
+            <a:ext cx="3398520" cy="915772"/>
           </a:xfrm>
           <a:prstGeom prst="rect">
             <a:avLst/>
@@ -23750,8 +23749,8 @@
         </p:blipFill>
         <p:spPr>
           <a:xfrm>
-            <a:off x="3654552" y="3488436"/>
-            <a:ext cx="329184" cy="329184"/>
+            <a:off x="3691128" y="1947672"/>
+            <a:ext cx="310896" cy="310896"/>
           </a:xfrm>
           <a:prstGeom prst="rect">
             <a:avLst/>
@@ -23842,7 +23841,7 @@
         <p:spPr>
           <a:xfrm>
             <a:off x="4395216" y="2920136"/>
-            <a:ext cx="3398520" cy="577444"/>
+            <a:ext cx="3398520" cy="915772"/>
           </a:xfrm>
           <a:prstGeom prst="rect">
             <a:avLst/>
@@ -23896,8 +23895,8 @@
         </p:blipFill>
         <p:spPr>
           <a:xfrm>
-            <a:off x="7427976" y="3488436"/>
-            <a:ext cx="329184" cy="329184"/>
+            <a:off x="7464552" y="1947672"/>
+            <a:ext cx="310896" cy="310896"/>
           </a:xfrm>
           <a:prstGeom prst="rect">
             <a:avLst/>
@@ -23988,7 +23987,7 @@
         <p:spPr>
           <a:xfrm>
             <a:off x="8168640" y="2920136"/>
-            <a:ext cx="3398520" cy="577444"/>
+            <a:ext cx="3398520" cy="915772"/>
           </a:xfrm>
           <a:prstGeom prst="rect">
             <a:avLst/>
@@ -24042,8 +24041,8 @@
         </p:blipFill>
         <p:spPr>
           <a:xfrm>
-            <a:off x="11201400" y="3488436"/>
-            <a:ext cx="329184" cy="329184"/>
+            <a:off x="11237976" y="1947672"/>
+            <a:ext cx="310896" cy="310896"/>
           </a:xfrm>
           <a:prstGeom prst="rect">
             <a:avLst/>
@@ -24134,7 +24133,7 @@
         <p:spPr>
           <a:xfrm>
             <a:off x="621792" y="5183276"/>
-            <a:ext cx="3398520" cy="577444"/>
+            <a:ext cx="3398520" cy="915772"/>
           </a:xfrm>
           <a:prstGeom prst="rect">
             <a:avLst/>
@@ -24188,8 +24187,8 @@
         </p:blipFill>
         <p:spPr>
           <a:xfrm>
-            <a:off x="3654552" y="5751576"/>
-            <a:ext cx="329184" cy="329184"/>
+            <a:off x="3691128" y="4210812"/>
+            <a:ext cx="310896" cy="310896"/>
           </a:xfrm>
           <a:prstGeom prst="rect">
             <a:avLst/>
@@ -24280,7 +24279,7 @@
         <p:spPr>
           <a:xfrm>
             <a:off x="4395216" y="5183276"/>
-            <a:ext cx="3398520" cy="577444"/>
+            <a:ext cx="3398520" cy="915772"/>
           </a:xfrm>
           <a:prstGeom prst="rect">
             <a:avLst/>
@@ -24334,8 +24333,8 @@
         </p:blipFill>
         <p:spPr>
           <a:xfrm>
-            <a:off x="7427976" y="5751576"/>
-            <a:ext cx="329184" cy="329184"/>
+            <a:off x="7464552" y="4210812"/>
+            <a:ext cx="310896" cy="310896"/>
           </a:xfrm>
           <a:prstGeom prst="rect">
             <a:avLst/>
@@ -24494,7 +24493,7 @@
         <p:spPr>
           <a:xfrm>
             <a:off x="548640" y="1325880"/>
-            <a:ext cx="11064240" cy="457200"/>
+            <a:ext cx="11091672" cy="457200"/>
           </a:xfrm>
           <a:prstGeom prst="rect">
             <a:avLst/>
@@ -24562,7 +24561,7 @@
           <p:nvPr>
             <p:extLst>
               <p:ext uri="{D42A27DB-BD31-4B8C-83A1-F6EECF244321}">
-                <p14:modId xmlns:p14="http://schemas.microsoft.com/office/powerpoint/2010/main" val="133077196"/>
+                <p14:modId xmlns:p14="http://schemas.microsoft.com/office/powerpoint/2010/main" val="158354855"/>
               </p:ext>
             </p:extLst>
           </p:nvPr>
@@ -25181,7 +25180,7 @@
         <p:spPr>
           <a:xfrm>
             <a:off x="548640" y="1325880"/>
-            <a:ext cx="11064240" cy="548640"/>
+            <a:ext cx="11091672" cy="548640"/>
           </a:xfrm>
           <a:prstGeom prst="rect">
             <a:avLst/>
@@ -25499,7 +25498,7 @@
               <a:buNone/>
             </a:pPr>
             <a:r>
-              <a:rPr lang="ko-KR" altLang="en-US" sz="2400" dirty="0">
+              <a:rPr lang="ko-KR" altLang="en-US" sz="2300" dirty="0">
                 <a:solidFill>
                   <a:srgbClr val="14142B"/>
                 </a:solidFill>
@@ -25510,7 +25509,7 @@
               <a:t>저녁에 불고기를 </a:t>
             </a:r>
             <a:r>
-              <a:rPr lang="en-US" sz="2400" dirty="0">
+              <a:rPr lang="en-US" sz="2300" dirty="0">
                 <a:solidFill>
                   <a:srgbClr val="14142B"/>
                 </a:solidFill>
@@ -25518,7 +25517,7 @@
               <a:t>______. (</a:t>
             </a:r>
             <a:r>
-              <a:rPr lang="ko-KR" altLang="en-US" sz="2400" dirty="0">
+              <a:rPr lang="ko-KR" altLang="en-US" sz="2300" dirty="0">
                 <a:solidFill>
                   <a:srgbClr val="14142B"/>
                 </a:solidFill>
@@ -25529,14 +25528,14 @@
               <a:t>먹다</a:t>
             </a:r>
             <a:r>
-              <a:rPr lang="en-US" sz="2400" dirty="0">
+              <a:rPr lang="en-US" sz="2300" dirty="0">
                 <a:solidFill>
                   <a:srgbClr val="14142B"/>
                 </a:solidFill>
               </a:rPr>
               <a:t>)</a:t>
             </a:r>
-            <a:endParaRPr lang="en-US" sz="2400" dirty="0"/>
+            <a:endParaRPr lang="en-US" sz="2300" dirty="0"/>
           </a:p>
         </p:txBody>
       </p:sp>
@@ -25725,7 +25724,7 @@
               <a:buNone/>
             </a:pPr>
             <a:r>
-              <a:rPr lang="ko-KR" altLang="en-US" sz="2400" dirty="0">
+              <a:rPr lang="ko-KR" altLang="en-US" sz="2300" dirty="0">
                 <a:solidFill>
                   <a:srgbClr val="14142B"/>
                 </a:solidFill>
@@ -25736,7 +25735,7 @@
               <a:t>내년에 서울에서 </a:t>
             </a:r>
             <a:r>
-              <a:rPr lang="en-US" sz="2400" dirty="0">
+              <a:rPr lang="en-US" sz="2300" dirty="0">
                 <a:solidFill>
                   <a:srgbClr val="14142B"/>
                 </a:solidFill>
@@ -25744,7 +25743,7 @@
               <a:t>______. (</a:t>
             </a:r>
             <a:r>
-              <a:rPr lang="ko-KR" altLang="en-US" sz="2400" dirty="0">
+              <a:rPr lang="ko-KR" altLang="en-US" sz="2300" dirty="0">
                 <a:solidFill>
                   <a:srgbClr val="14142B"/>
                 </a:solidFill>
@@ -25755,14 +25754,14 @@
               <a:t>살다</a:t>
             </a:r>
             <a:r>
-              <a:rPr lang="en-US" sz="2400" dirty="0">
+              <a:rPr lang="en-US" sz="2300" dirty="0">
                 <a:solidFill>
                   <a:srgbClr val="14142B"/>
                 </a:solidFill>
               </a:rPr>
               <a:t>)</a:t>
             </a:r>
-            <a:endParaRPr lang="en-US" sz="2400" dirty="0"/>
+            <a:endParaRPr lang="en-US" sz="2300" dirty="0"/>
           </a:p>
         </p:txBody>
       </p:sp>
@@ -26813,7 +26812,7 @@
         <p:spPr>
           <a:xfrm>
             <a:off x="548640" y="1325880"/>
-            <a:ext cx="11064240" cy="548640"/>
+            <a:ext cx="11091672" cy="548640"/>
           </a:xfrm>
           <a:prstGeom prst="rect">
             <a:avLst/>
@@ -26850,7 +26849,7 @@
         </p:nvSpPr>
         <p:spPr>
           <a:xfrm>
-            <a:off x="548640" y="2171700"/>
+            <a:off x="548640" y="2574950"/>
             <a:ext cx="457200" cy="457200"/>
           </a:xfrm>
           <a:prstGeom prst="ellipse">
@@ -26875,7 +26874,7 @@
         </p:nvSpPr>
         <p:spPr>
           <a:xfrm>
-            <a:off x="548640" y="2171700"/>
+            <a:off x="548640" y="2574950"/>
             <a:ext cx="457200" cy="457200"/>
           </a:xfrm>
           <a:prstGeom prst="rect">
@@ -26913,7 +26912,7 @@
         </p:nvSpPr>
         <p:spPr>
           <a:xfrm>
-            <a:off x="1188720" y="1965960"/>
+            <a:off x="1188720" y="2369210"/>
             <a:ext cx="5285232" cy="868680"/>
           </a:xfrm>
           <a:prstGeom prst="rect">
@@ -26932,7 +26931,7 @@
               <a:buNone/>
             </a:pPr>
             <a:r>
-              <a:rPr lang="ko-KR" altLang="en-US" sz="2300" dirty="0">
+              <a:rPr lang="ko-KR" altLang="en-US" sz="2100" dirty="0">
                 <a:solidFill>
                   <a:srgbClr val="14142B"/>
                 </a:solidFill>
@@ -26943,7 +26942,7 @@
               <a:t>Quiz en línea 2 · ¿Qué va en el hueco? 내일</a:t>
             </a:r>
             <a:r>
-              <a:rPr lang="en-US" sz="2300" dirty="0">
+              <a:rPr lang="en-US" sz="2100" dirty="0">
                 <a:solidFill>
                   <a:srgbClr val="14142B"/>
                 </a:solidFill>
@@ -26951,7 +26950,7 @@
               <a:t>___ </a:t>
             </a:r>
             <a:r>
-              <a:rPr lang="ko-KR" altLang="en-US" sz="2300" dirty="0">
+              <a:rPr lang="ko-KR" altLang="en-US" sz="2100" dirty="0">
                 <a:solidFill>
                   <a:srgbClr val="14142B"/>
                 </a:solidFill>
@@ -26962,14 +26961,14 @@
               <a:t>한국에 갈 거예요</a:t>
             </a:r>
             <a:r>
-              <a:rPr lang="en-US" sz="2300" dirty="0">
+              <a:rPr lang="en-US" sz="2100" dirty="0">
                 <a:solidFill>
                   <a:srgbClr val="14142B"/>
                 </a:solidFill>
               </a:rPr>
               <a:t>.</a:t>
             </a:r>
-            <a:endParaRPr lang="en-US" sz="2300" dirty="0"/>
+            <a:endParaRPr lang="en-US" sz="2100" dirty="0"/>
           </a:p>
         </p:txBody>
       </p:sp>
@@ -26981,7 +26980,7 @@
         </p:nvSpPr>
         <p:spPr>
           <a:xfrm>
-            <a:off x="6702552" y="2002536"/>
+            <a:off x="6702552" y="2405786"/>
             <a:ext cx="4937760" cy="795528"/>
           </a:xfrm>
           <a:prstGeom prst="roundRect">
@@ -27008,7 +27007,7 @@
         </p:nvSpPr>
         <p:spPr>
           <a:xfrm>
-            <a:off x="6793992" y="2002536"/>
+            <a:off x="6793992" y="2405786"/>
             <a:ext cx="4754880" cy="795528"/>
           </a:xfrm>
           <a:prstGeom prst="rect">
@@ -27076,7 +27075,7 @@
         </p:nvSpPr>
         <p:spPr>
           <a:xfrm>
-            <a:off x="548640" y="3168396"/>
+            <a:off x="548640" y="3571646"/>
             <a:ext cx="457200" cy="457200"/>
           </a:xfrm>
           <a:prstGeom prst="ellipse">
@@ -27101,7 +27100,7 @@
         </p:nvSpPr>
         <p:spPr>
           <a:xfrm>
-            <a:off x="548640" y="3168396"/>
+            <a:off x="548640" y="3571646"/>
             <a:ext cx="457200" cy="457200"/>
           </a:xfrm>
           <a:prstGeom prst="rect">
@@ -27139,7 +27138,7 @@
         </p:nvSpPr>
         <p:spPr>
           <a:xfrm>
-            <a:off x="1188720" y="2962656"/>
+            <a:off x="1188720" y="3365906"/>
             <a:ext cx="5285232" cy="868680"/>
           </a:xfrm>
           <a:prstGeom prst="rect">
@@ -27207,7 +27206,7 @@
         </p:nvSpPr>
         <p:spPr>
           <a:xfrm>
-            <a:off x="6702552" y="2999232"/>
+            <a:off x="6702552" y="3402482"/>
             <a:ext cx="4937760" cy="795528"/>
           </a:xfrm>
           <a:prstGeom prst="roundRect">
@@ -27234,7 +27233,7 @@
         </p:nvSpPr>
         <p:spPr>
           <a:xfrm>
-            <a:off x="6793992" y="2999232"/>
+            <a:off x="6793992" y="3402482"/>
             <a:ext cx="4754880" cy="795528"/>
           </a:xfrm>
           <a:prstGeom prst="rect">
@@ -27302,7 +27301,7 @@
         </p:nvSpPr>
         <p:spPr>
           <a:xfrm>
-            <a:off x="548640" y="4165092"/>
+            <a:off x="548640" y="4568342"/>
             <a:ext cx="457200" cy="457200"/>
           </a:xfrm>
           <a:prstGeom prst="ellipse">
@@ -27327,7 +27326,7 @@
         </p:nvSpPr>
         <p:spPr>
           <a:xfrm>
-            <a:off x="548640" y="4165092"/>
+            <a:off x="548640" y="4568342"/>
             <a:ext cx="457200" cy="457200"/>
           </a:xfrm>
           <a:prstGeom prst="rect">
@@ -27365,7 +27364,7 @@
         </p:nvSpPr>
         <p:spPr>
           <a:xfrm>
-            <a:off x="1188720" y="3959352"/>
+            <a:off x="1188720" y="4362602"/>
             <a:ext cx="5285232" cy="868680"/>
           </a:xfrm>
           <a:prstGeom prst="rect">
@@ -27414,7 +27413,7 @@
         </p:nvSpPr>
         <p:spPr>
           <a:xfrm>
-            <a:off x="6702552" y="3995928"/>
+            <a:off x="6702552" y="4399178"/>
             <a:ext cx="4937760" cy="795528"/>
           </a:xfrm>
           <a:prstGeom prst="roundRect">
@@ -27441,7 +27440,7 @@
         </p:nvSpPr>
         <p:spPr>
           <a:xfrm>
-            <a:off x="6793992" y="3995928"/>
+            <a:off x="6793992" y="4399178"/>
             <a:ext cx="4754880" cy="795528"/>
           </a:xfrm>
           <a:prstGeom prst="rect">
@@ -27925,16 +27924,40 @@
           </a:p>
         </p:txBody>
       </p:sp>
-      <p:sp>
-        <p:nvSpPr>
-          <p:cNvPr id="3" name="panel"/>
+      <p:pic>
+        <p:nvPicPr>
+          <p:cNvPr id="3" name="imagen" descr="C:\Users\Chingu\AppData\Local\Temp\claude\C--Users-Chingu-Desktop-ACADEMIASEULWEB\d4111e1b-5523-44ea-97b2-b1a1d9545b9e\scratchpad\decks\cache\img_fdb42216d040bac5.png"/>
+          <p:cNvPicPr>
+            <a:picLocks noChangeAspect="1"/>
+          </p:cNvPicPr>
+          <p:nvPr/>
+        </p:nvPicPr>
+        <p:blipFill>
+          <a:blip r:embed="rId5"/>
+          <a:stretch>
+            <a:fillRect/>
+          </a:stretch>
+        </p:blipFill>
+        <p:spPr>
+          <a:xfrm>
+            <a:off x="7754112" y="1508760"/>
+            <a:ext cx="3886200" cy="4480560"/>
+          </a:xfrm>
+          <a:prstGeom prst="rect">
+            <a:avLst/>
+          </a:prstGeom>
+        </p:spPr>
+      </p:pic>
+      <p:sp>
+        <p:nvSpPr>
+          <p:cNvPr id="4" name="panel"/>
           <p:cNvSpPr/>
           <p:nvPr/>
         </p:nvSpPr>
         <p:spPr>
           <a:xfrm>
-            <a:off x="1280160" y="1645920"/>
-            <a:ext cx="9628632" cy="3108960"/>
+            <a:off x="548640" y="1645920"/>
+            <a:ext cx="6931152" cy="3108960"/>
           </a:xfrm>
           <a:prstGeom prst="roundRect">
             <a:avLst>
@@ -27954,14 +27977,14 @@
       </p:sp>
       <p:sp>
         <p:nvSpPr>
-          <p:cNvPr id="4" name="frase_ko"/>
+          <p:cNvPr id="5" name="frase_ko"/>
           <p:cNvSpPr txBox="1"/>
           <p:nvPr/>
         </p:nvSpPr>
         <p:spPr>
           <a:xfrm>
-            <a:off x="1463040" y="1828800"/>
-            <a:ext cx="9262872" cy="1828800"/>
+            <a:off x="731520" y="1828800"/>
+            <a:ext cx="6565392" cy="1828800"/>
           </a:xfrm>
           <a:prstGeom prst="rect">
             <a:avLst/>
@@ -28003,14 +28026,14 @@
       </p:sp>
       <p:sp>
         <p:nvSpPr>
-          <p:cNvPr id="5" name="Text 3"/>
+          <p:cNvPr id="6" name="Text 3"/>
           <p:cNvSpPr txBox="1"/>
           <p:nvPr/>
         </p:nvSpPr>
         <p:spPr>
           <a:xfrm>
-            <a:off x="1463040" y="3657600"/>
-            <a:ext cx="9262872" cy="822960"/>
+            <a:off x="1051560" y="3657600"/>
+            <a:ext cx="5742432" cy="822960"/>
           </a:xfrm>
           <a:prstGeom prst="rect">
             <a:avLst/>
@@ -28041,7 +28064,7 @@
       </p:sp>
       <p:pic>
         <p:nvPicPr>
-          <p:cNvPr id="6" name="Media 0">
+          <p:cNvPr id="7" name="Media 0">
             <a:hlinkClick r:id="" action="ppaction://media"/>
           </p:cNvPr>
           <p:cNvPicPr>
@@ -28057,14 +28080,14 @@
           </p:nvPr>
         </p:nvPicPr>
         <p:blipFill>
-          <a:blip r:embed="rId5"/>
+          <a:blip r:embed="rId6"/>
           <a:stretch>
             <a:fillRect/>
           </a:stretch>
         </p:blipFill>
         <p:spPr>
           <a:xfrm>
-            <a:off x="10332720" y="4160520"/>
+            <a:off x="6903720" y="4160520"/>
             <a:ext cx="384048" cy="384048"/>
           </a:xfrm>
           <a:prstGeom prst="rect">
@@ -28074,14 +28097,14 @@
       </p:pic>
       <p:sp>
         <p:nvSpPr>
-          <p:cNvPr id="7" name="lista"/>
+          <p:cNvPr id="8" name="lista"/>
           <p:cNvSpPr txBox="1"/>
           <p:nvPr/>
         </p:nvSpPr>
         <p:spPr>
           <a:xfrm>
-            <a:off x="1280160" y="4937760"/>
-            <a:ext cx="9628632" cy="1234440"/>
+            <a:off x="548640" y="4937760"/>
+            <a:ext cx="6931152" cy="1234440"/>
           </a:xfrm>
           <a:prstGeom prst="rect">
             <a:avLst/>
@@ -28274,7 +28297,7 @@
           <p:nvPr>
             <p:extLst>
               <p:ext uri="{D42A27DB-BD31-4B8C-83A1-F6EECF244321}">
-                <p14:modId xmlns:p14="http://schemas.microsoft.com/office/powerpoint/2010/main" val="3526714504"/>
+                <p14:modId xmlns:p14="http://schemas.microsoft.com/office/powerpoint/2010/main" val="647508103"/>
               </p:ext>
             </p:extLst>
           </p:nvPr>
@@ -28590,7 +28613,7 @@
                           <a:ea typeface="Malgun Gothic" pitchFamily="34" charset="-122"/>
                           <a:cs typeface="Malgun Gothic" pitchFamily="34" charset="-120"/>
                         </a:rPr>
-                        <a:t>수영할 수 있어요</a:t>
+                        <a:t>수영할 수 있어요</a:t>
                       </a:r>
                       <a:r>
                         <a:rPr lang="en-US" sz="1600" dirty="0">
@@ -29086,7 +29109,7 @@
                           <a:ea typeface="Malgun Gothic" pitchFamily="34" charset="-122"/>
                           <a:cs typeface="Malgun Gothic" pitchFamily="34" charset="-120"/>
                         </a:rPr>
-                        <a:t>운전은 할 수 있지만 수영은 못 해요</a:t>
+                        <a:t>운전은 할 수 있지만 수영은 못 해요</a:t>
                       </a:r>
                       <a:r>
                         <a:rPr lang="en-US" sz="1600" dirty="0">
@@ -29342,7 +29365,7 @@
         <p:spPr>
           <a:xfrm>
             <a:off x="548640" y="1325880"/>
-            <a:ext cx="6949440" cy="548640"/>
+            <a:ext cx="5669280" cy="548640"/>
           </a:xfrm>
           <a:prstGeom prst="rect">
             <a:avLst/>
@@ -29380,7 +29403,7 @@
         <p:spPr>
           <a:xfrm>
             <a:off x="548640" y="1965960"/>
-            <a:ext cx="6949440" cy="4206240"/>
+            <a:ext cx="5669280" cy="4206240"/>
           </a:xfrm>
           <a:prstGeom prst="rect">
             <a:avLst/>
@@ -29402,7 +29425,7 @@
               <a:buChar char="•"/>
             </a:pPr>
             <a:r>
-              <a:rPr lang="ko-KR" altLang="en-US" sz="2400" dirty="0">
+              <a:rPr lang="ko-KR" altLang="en-US" sz="2800" dirty="0">
                 <a:solidFill>
                   <a:srgbClr val="14142B"/>
                 </a:solidFill>
@@ -29413,14 +29436,14 @@
               <a:t>저는 담배를 안 피워요</a:t>
             </a:r>
             <a:r>
-              <a:rPr lang="en-US" sz="2400" dirty="0">
+              <a:rPr lang="en-US" sz="2800" dirty="0">
                 <a:solidFill>
                   <a:srgbClr val="14142B"/>
                 </a:solidFill>
               </a:rPr>
               <a:t>.</a:t>
             </a:r>
-            <a:endParaRPr lang="en-US" sz="2400" dirty="0"/>
+            <a:endParaRPr lang="en-US" sz="2800" dirty="0"/>
           </a:p>
           <a:p>
             <a:pPr marL="228600" indent="-228600" eaLnBrk="1">
@@ -29431,7 +29454,7 @@
               <a:buChar char="•"/>
             </a:pPr>
             <a:r>
-              <a:rPr lang="ko-KR" altLang="en-US" sz="2400" dirty="0">
+              <a:rPr lang="ko-KR" altLang="en-US" sz="2800" dirty="0">
                 <a:solidFill>
                   <a:srgbClr val="14142B"/>
                 </a:solidFill>
@@ -29442,14 +29465,14 @@
               <a:t>저는 춤을 잘 못 춰요</a:t>
             </a:r>
             <a:r>
-              <a:rPr lang="en-US" sz="2400" dirty="0">
+              <a:rPr lang="en-US" sz="2800" dirty="0">
                 <a:solidFill>
                   <a:srgbClr val="14142B"/>
                 </a:solidFill>
               </a:rPr>
               <a:t>.</a:t>
             </a:r>
-            <a:endParaRPr lang="en-US" sz="2400" dirty="0"/>
+            <a:endParaRPr lang="en-US" sz="2800" dirty="0"/>
           </a:p>
           <a:p>
             <a:pPr marL="228600" indent="-228600" eaLnBrk="1">
@@ -29460,7 +29483,7 @@
               <a:buChar char="•"/>
             </a:pPr>
             <a:r>
-              <a:rPr lang="ko-KR" altLang="en-US" sz="2400" dirty="0">
+              <a:rPr lang="ko-KR" altLang="en-US" sz="2800" dirty="0">
                 <a:solidFill>
                   <a:srgbClr val="14142B"/>
                 </a:solidFill>
@@ -29468,17 +29491,17 @@
                 <a:ea typeface="Malgun Gothic" pitchFamily="34" charset="-122"/>
                 <a:cs typeface="Malgun Gothic" pitchFamily="34" charset="-120"/>
               </a:rPr>
-              <a:t>그리고 저는 운전할 수 있어요</a:t>
-            </a:r>
-            <a:r>
-              <a:rPr lang="en-US" sz="2400" dirty="0">
+              <a:t>그리고 저는 운전할 수 있어요</a:t>
+            </a:r>
+            <a:r>
+              <a:rPr lang="en-US" sz="2800" dirty="0">
                 <a:solidFill>
                   <a:srgbClr val="14142B"/>
                 </a:solidFill>
               </a:rPr>
               <a:t>.</a:t>
             </a:r>
-            <a:endParaRPr lang="en-US" sz="2400" dirty="0"/>
+            <a:endParaRPr lang="en-US" sz="2800" dirty="0"/>
           </a:p>
         </p:txBody>
       </p:sp>
@@ -29490,12 +29513,12 @@
         </p:nvSpPr>
         <p:spPr>
           <a:xfrm>
-            <a:off x="8001000" y="1417320"/>
-            <a:ext cx="3611880" cy="4480560"/>
+            <a:off x="6446520" y="1371600"/>
+            <a:ext cx="5193792" cy="4800600"/>
           </a:xfrm>
           <a:prstGeom prst="roundRect">
             <a:avLst>
-              <a:gd name="adj" fmla="val 6329"/>
+              <a:gd name="adj" fmla="val 4762"/>
             </a:avLst>
           </a:prstGeom>
           <a:solidFill>
@@ -29509,58 +29532,30 @@
           </a:ln>
         </p:spPr>
       </p:sp>
-      <p:sp>
-        <p:nvSpPr>
-          <p:cNvPr id="6" name="imagen_pendiente"/>
-          <p:cNvSpPr txBox="1"/>
+      <p:pic>
+        <p:nvPicPr>
+          <p:cNvPr id="6" name="imagen" descr="C:\Users\Chingu\AppData\Local\Temp\claude\C--Users-Chingu-Desktop-ACADEMIASEULWEB\d4111e1b-5523-44ea-97b2-b1a1d9545b9e\scratchpad\decks\cache\img_11060ad6089cf458.png"/>
+          <p:cNvPicPr>
+            <a:picLocks noChangeAspect="1"/>
+          </p:cNvPicPr>
           <p:nvPr/>
-        </p:nvSpPr>
+        </p:nvPicPr>
+        <p:blipFill>
+          <a:blip r:embed="rId3"/>
+          <a:stretch>
+            <a:fillRect/>
+          </a:stretch>
+        </p:blipFill>
         <p:spPr>
           <a:xfrm>
-            <a:off x="8183880" y="1600200"/>
-            <a:ext cx="3246120" cy="4114800"/>
+            <a:off x="7040833" y="1463040"/>
+            <a:ext cx="4005165" cy="4617720"/>
           </a:xfrm>
           <a:prstGeom prst="rect">
             <a:avLst/>
           </a:prstGeom>
-          <a:noFill/>
-          <a:ln/>
         </p:spPr>
-        <p:txBody>
-          <a:bodyPr wrap="square" lIns="76200" tIns="76200" rIns="76200" bIns="76200" rtlCol="0" anchor="ctr">
-            <a:normAutofit/>
-          </a:bodyPr>
-          <a:lstStyle/>
-          <a:p>
-            <a:pPr marL="0" indent="0" algn="ctr" eaLnBrk="1">
-              <a:buNone/>
-            </a:pPr>
-            <a:r>
-              <a:rPr lang="en-US" sz="1600" b="1" dirty="0">
-                <a:solidFill>
-                  <a:srgbClr val="4236F6"/>
-                </a:solidFill>
-              </a:rPr>
-              <a:t>Imagen pendiente</a:t>
-            </a:r>
-            <a:endParaRPr lang="en-US" sz="1600" dirty="0"/>
-          </a:p>
-          <a:p>
-            <a:pPr marL="0" indent="0" algn="ctr" eaLnBrk="1">
-              <a:buNone/>
-            </a:pPr>
-            <a:r>
-              <a:rPr lang="en-US" sz="1300" dirty="0">
-                <a:solidFill>
-                  <a:srgbClr val="5C5F6B"/>
-                </a:solidFill>
-              </a:rPr>
-              <a:t>3 fotos de Jay: un cartel de 'no fumar' o Jay con un café · Jay bailando en un matrimonio (foto o GIF) · Jay manejando</a:t>
-            </a:r>
-            <a:endParaRPr lang="en-US" sz="1600" dirty="0"/>
-          </a:p>
-        </p:txBody>
-      </p:sp>
+      </p:pic>
       <p:sp>
         <p:nvSpPr>
           <p:cNvPr id="25" name="Slide Number Placeholder 0"/>

--- a/Curriculo/Fase3_Basico2/decks/Basico2_S06_Jay.pptx
+++ b/Curriculo/Fase3_Basico2/decks/Basico2_S06_Jay.pptx
@@ -139,7 +139,7 @@
   <p:extLst>
     <p:ext uri="{521415D9-36F7-43E2-AB2F-B90AF26B5E84}">
       <p14:sectionLst xmlns:p14="http://schemas.microsoft.com/office/powerpoint/2010/main">
-        <p14:section name="Semana 6" id="{33EB28A2-3BE2-22D3-8D86-7687CCE0AF88}">
+        <p14:section name="Semana 6" id="{A15C02ED-8A2A-71D8-9BE1-63F9CD7BF36E}">
           <p14:sldIdLst>
             <p14:sldId id="256"/>
             <p14:sldId id="257"/>
@@ -210,7 +210,7 @@
     </p:spTree>
     <p:extLst>
       <p:ext uri="{BB962C8B-B14F-4D97-AF65-F5344CB8AC3E}">
-        <p14:creationId xmlns:p14="http://schemas.microsoft.com/office/powerpoint/2010/main" val="1328438413"/>
+        <p14:creationId xmlns:p14="http://schemas.microsoft.com/office/powerpoint/2010/main" val="479427678"/>
       </p:ext>
     </p:extLst>
   </p:cSld>
@@ -356,7 +356,7 @@
           <a:p>
             <a:r>
               <a:rPr lang="en-US" dirty="0"/>
-              <a:t>20:50–21:00, en pantalla mientras entran (Compartir sonido marcado). A las 21:00 en punto, graba desde el minuto 0 (Basico2_S06_2026-11-18) y saluda: «안녕하세요, 여러분!». Antes de pasar a L2, pon el chat en 'solo anfitrión'.
+              <a:t>20:50–21:00, en pantalla mientras entran (Compartir sonido marcado). A las 21:00 en punto, graba desde el minuto 0 (Basico2_S06_2026-11-25) y saluda: «안녕하세요, 여러분!». Antes de pasar a L2, pon el chat en 'solo anfitrión'.
 Fuente: Portada de la plantilla
 Lámina 1</a:t>
             </a:r>
@@ -2492,7 +2492,7 @@
           <a:p>
             <a:r>
               <a:rPr lang="en-US" dirty="0"/>
-              <a:t>30 s. Anticipo del quiz 6 y el dato de la sopa: muchos no comen 미역국 antes de un examen porque es resbalosa, y en coreano 'resbalarse' en un examen es reprobar (está en el blog). Despedida: «오늘 수능 보는 학생들, 화이팅! 여러분도 화이팅! 감사합니다!» (revisar: 보는 es input tuyo; si prefieres, solo «여러분, 화이팅! 감사합니다!»). A las 22:00 en punto: 'Finalizar reunión para todos'.
+              <a:t>30 s. Anticipo del quiz 6 y el dato de la sopa: muchos no comen 미역국 antes de un examen porque es resbalosa, y en coreano 'resbalarse' en un examen es reprobar (está en el blog). Despedida: «여러분, 화이팅! 감사합니다!» (con el curso corrido una semana, el 수능 ya fue: la despedida «오늘 수능 보는 학생들, 화이팅!» ya no corresponde). A las 22:00 en punto: 'Finalizar reunión para todos'.
 Fuente: Nueva
 Lámina 28</a:t>
             </a:r>
@@ -2848,7 +2848,7 @@
           <a:p>
             <a:r>
               <a:rPr lang="en-US" dirty="0"/>
-              <a:t>≈ 1 min, termina a las 21:05. Las dos preguntas del quiz en línea 2 son de respaldo (la 5 y la 8 de su clave, en la guía de la S5): el lun 16 cámbialas por las 2 más falladas según el resumen del formulario y resuelve cada una en 20 s. Termina con el error frecuente de la Hoja 5 en 10 s (este, o el que anotaste: 가을 거예요, 갈거예요 sin espacio). La forma mala va tachada en gris.
+              <a:t>≈ 1 min, termina a las 21:05. Las dos preguntas del quiz en línea 2 son de respaldo (la 5 y la 8 de su clave, en la guía de la S5): el lun 23 cámbialas por las 2 más falladas según el resumen del formulario y resuelve cada una en 20 s. Termina con el error frecuente de la Hoja 5 en 10 s (este, o el que anotaste: 가을 거예요, 갈거예요 sin espacio). La forma mala va tachada en gris.
 Fuente: Nueva (preguntas del quiz en línea 2: guía de la S5, C.16.4)
 Lámina 4b</a:t>
             </a:r>
@@ -2937,7 +2937,7 @@
           <a:p>
             <a:r>
               <a:rPr lang="en-US" dirty="0"/>
-              <a:t>21:05 · 40 s. En Corea es jueves 19, las 9 de la mañana, y se rinde el 수능, el examen de ingreso a la universidad; en este momento corre la primera prueba, que es de coreano, 국어 (revisar: confirma el horario 2026 en kice.re.kr). A quien va a rendir un examen se le dice 시험 잘 보세요!: solo para reconocer. Guiño de 10 s: «¿Se acuerdan de la sopa del cumpleaños, 미역국? Hoy muchos no la comen; se los cuento al final… o lo leen en el blog.» Si preguntan por los aviones: una línea y sigues.
+              <a:t>21:05 · 40 s. «¿Se acuerdan de la clase de la semana pasada? En Corea eran las 9 de la mañana del jueves 19, y se rendía el 수능, el examen de ingreso a la universidad.» Mientras teníamos la clase 5 corría la primera prueba, que es de coreano, 국어 (revisar: confirma el horario 2026 en kice.re.kr): estudiamos coreano a la misma hora que ellos. A quien va a rendir un examen se le dice 시험 잘 보세요!: solo para reconocer. Guiño de 10 s: «¿Se acuerdan de la sopa del cumpleaños, 미역국? Antes de un examen, muchos no la comen; se los cuento al final… o lo leen en el blog.» Si preguntan por los aviones: una línea y sigues.
 Imagen: incluida (dibujo de la casa).
 Fuente: Nueva
 Lámina 5</a:t>
@@ -4393,7 +4393,7 @@
                 <a:ea typeface="Malgun Gothic" pitchFamily="34" charset="-122"/>
                 <a:cs typeface="Malgun Gothic" pitchFamily="34" charset="-120"/>
               </a:rPr>
-              <a:t>En Corea: jueves 19, 09:00 · hoy es el 수능</a:t>
+              <a:t>En Corea: jueves 26, 09:00 · el jueves pasado fue el 수능</a:t>
             </a:r>
             <a:endParaRPr lang="en-US" sz="2200" dirty="0"/>
           </a:p>
@@ -5532,7 +5532,7 @@
           <p:nvPr>
             <p:extLst>
               <p:ext uri="{D42A27DB-BD31-4B8C-83A1-F6EECF244321}">
-                <p14:modId xmlns:p14="http://schemas.microsoft.com/office/powerpoint/2010/main" val="3635420915"/>
+                <p14:modId xmlns:p14="http://schemas.microsoft.com/office/powerpoint/2010/main" val="2920708586"/>
               </p:ext>
             </p:extLst>
           </p:nvPr>
@@ -10593,7 +10593,7 @@
           <p:nvPr>
             <p:extLst>
               <p:ext uri="{D42A27DB-BD31-4B8C-83A1-F6EECF244321}">
-                <p14:modId xmlns:p14="http://schemas.microsoft.com/office/powerpoint/2010/main" val="1877885623"/>
+                <p14:modId xmlns:p14="http://schemas.microsoft.com/office/powerpoint/2010/main" val="4150296949"/>
               </p:ext>
             </p:extLst>
           </p:nvPr>
@@ -11984,7 +11984,7 @@
           <p:nvPr>
             <p:extLst>
               <p:ext uri="{D42A27DB-BD31-4B8C-83A1-F6EECF244321}">
-                <p14:modId xmlns:p14="http://schemas.microsoft.com/office/powerpoint/2010/main" val="1260399267"/>
+                <p14:modId xmlns:p14="http://schemas.microsoft.com/office/powerpoint/2010/main" val="625900800"/>
               </p:ext>
             </p:extLst>
           </p:nvPr>
@@ -15761,7 +15761,7 @@
           <p:nvPr>
             <p:extLst>
               <p:ext uri="{D42A27DB-BD31-4B8C-83A1-F6EECF244321}">
-                <p14:modId xmlns:p14="http://schemas.microsoft.com/office/powerpoint/2010/main" val="3133859185"/>
+                <p14:modId xmlns:p14="http://schemas.microsoft.com/office/powerpoint/2010/main" val="185401145"/>
               </p:ext>
             </p:extLst>
           </p:nvPr>
@@ -17382,7 +17382,7 @@
           <p:nvPr>
             <p:extLst>
               <p:ext uri="{D42A27DB-BD31-4B8C-83A1-F6EECF244321}">
-                <p14:modId xmlns:p14="http://schemas.microsoft.com/office/powerpoint/2010/main" val="709116831"/>
+                <p14:modId xmlns:p14="http://schemas.microsoft.com/office/powerpoint/2010/main" val="2479123842"/>
               </p:ext>
             </p:extLst>
           </p:nvPr>
@@ -18615,7 +18615,7 @@
           <p:nvPr>
             <p:extLst>
               <p:ext uri="{D42A27DB-BD31-4B8C-83A1-F6EECF244321}">
-                <p14:modId xmlns:p14="http://schemas.microsoft.com/office/powerpoint/2010/main" val="2634971654"/>
+                <p14:modId xmlns:p14="http://schemas.microsoft.com/office/powerpoint/2010/main" val="2110261721"/>
               </p:ext>
             </p:extLst>
           </p:nvPr>
@@ -21164,7 +21164,7 @@
           <p:nvPr>
             <p:extLst>
               <p:ext uri="{D42A27DB-BD31-4B8C-83A1-F6EECF244321}">
-                <p14:modId xmlns:p14="http://schemas.microsoft.com/office/powerpoint/2010/main" val="371800949"/>
+                <p14:modId xmlns:p14="http://schemas.microsoft.com/office/powerpoint/2010/main" val="332198900"/>
               </p:ext>
             </p:extLst>
           </p:nvPr>
@@ -22877,7 +22877,7 @@
                   <a:srgbClr val="4236F6"/>
                 </a:solidFill>
               </a:rPr>
-              <a:t>Plazo: miércoles 25 de noviembre, 21:00 (hora de Chile) · todo en el grupo de WhatsApp</a:t>
+              <a:t>Plazo: miércoles 2 de diciembre, 21:00 (hora de Chile) · todo en el grupo de WhatsApp</a:t>
             </a:r>
             <a:endParaRPr lang="en-US" sz="1800" dirty="0"/>
           </a:p>
@@ -23319,7 +23319,7 @@
                   <a:srgbClr val="FFFFFF"/>
                 </a:solidFill>
               </a:rPr>
-              <a:t>Clase 7: miércoles 25 de noviembre, 21:00 (hora de Chile)</a:t>
+              <a:t>Clase 7: miércoles 2 de diciembre, 21:00 (hora de Chile)</a:t>
             </a:r>
             <a:endParaRPr lang="en-US" sz="2200" dirty="0"/>
           </a:p>
@@ -24057,7 +24057,7 @@
         </p:nvSpPr>
         <p:spPr>
           <a:xfrm>
-            <a:off x="548640" y="4137660"/>
+            <a:off x="2435352" y="4137660"/>
             <a:ext cx="3544824" cy="2034540"/>
           </a:xfrm>
           <a:prstGeom prst="roundRect">
@@ -24091,7 +24091,7 @@
         </p:nvSpPr>
         <p:spPr>
           <a:xfrm>
-            <a:off x="548640" y="4491533"/>
+            <a:off x="2435352" y="4491533"/>
             <a:ext cx="3544824" cy="691744"/>
           </a:xfrm>
           <a:prstGeom prst="rect">
@@ -24132,7 +24132,7 @@
         </p:nvSpPr>
         <p:spPr>
           <a:xfrm>
-            <a:off x="621792" y="5183276"/>
+            <a:off x="2508504" y="5183276"/>
             <a:ext cx="3398520" cy="915772"/>
           </a:xfrm>
           <a:prstGeom prst="rect">
@@ -24187,7 +24187,7 @@
         </p:blipFill>
         <p:spPr>
           <a:xfrm>
-            <a:off x="3691128" y="4210812"/>
+            <a:off x="5577840" y="4210812"/>
             <a:ext cx="310896" cy="310896"/>
           </a:xfrm>
           <a:prstGeom prst="rect">
@@ -24203,7 +24203,7 @@
         </p:nvSpPr>
         <p:spPr>
           <a:xfrm>
-            <a:off x="4322064" y="4137660"/>
+            <a:off x="6208776" y="4137660"/>
             <a:ext cx="3544824" cy="2034540"/>
           </a:xfrm>
           <a:prstGeom prst="roundRect">
@@ -24237,7 +24237,7 @@
         </p:nvSpPr>
         <p:spPr>
           <a:xfrm>
-            <a:off x="4322064" y="4491533"/>
+            <a:off x="6208776" y="4491533"/>
             <a:ext cx="3544824" cy="691744"/>
           </a:xfrm>
           <a:prstGeom prst="rect">
@@ -24278,7 +24278,7 @@
         </p:nvSpPr>
         <p:spPr>
           <a:xfrm>
-            <a:off x="4395216" y="5183276"/>
+            <a:off x="6281928" y="5183276"/>
             <a:ext cx="3398520" cy="915772"/>
           </a:xfrm>
           <a:prstGeom prst="rect">
@@ -24333,7 +24333,7 @@
         </p:blipFill>
         <p:spPr>
           <a:xfrm>
-            <a:off x="7464552" y="4210812"/>
+            <a:off x="9351264" y="4210812"/>
             <a:ext cx="310896" cy="310896"/>
           </a:xfrm>
           <a:prstGeom prst="rect">
@@ -24561,7 +24561,7 @@
           <p:nvPr>
             <p:extLst>
               <p:ext uri="{D42A27DB-BD31-4B8C-83A1-F6EECF244321}">
-                <p14:modId xmlns:p14="http://schemas.microsoft.com/office/powerpoint/2010/main" val="158354855"/>
+                <p14:modId xmlns:p14="http://schemas.microsoft.com/office/powerpoint/2010/main" val="3275357198"/>
               </p:ext>
             </p:extLst>
           </p:nvPr>
@@ -26835,7 +26835,7 @@
                   <a:srgbClr val="4236F6"/>
                 </a:solidFill>
               </a:rPr>
-              <a:t>Las 2 preguntas más falladas + 1 error frecuente de la Hoja 5 (se completa el lun 16) · ¿Qué va? Las respuestas aparecen con clic.</a:t>
+              <a:t>Las 2 preguntas más falladas + 1 error frecuente de la Hoja 5 (se completa el lun 23) · ¿Qué va? Las respuestas aparecen con clic.</a:t>
             </a:r>
             <a:endParaRPr lang="en-US" sz="1800" dirty="0"/>
           </a:p>
@@ -27880,7 +27880,7 @@
                 <a:ea typeface="Malgun Gothic" pitchFamily="34" charset="-122"/>
                 <a:cs typeface="Malgun Gothic" pitchFamily="34" charset="-120"/>
               </a:rPr>
-              <a:t>지금 한국은</a:t>
+              <a:t>지난주 목요일</a:t>
             </a:r>
             <a:r>
               <a:rPr lang="en-US" sz="2200" b="1" dirty="0">
@@ -27888,7 +27888,7 @@
                   <a:srgbClr val="4236F6"/>
                 </a:solidFill>
               </a:rPr>
-              <a:t>… </a:t>
+              <a:t>, </a:t>
             </a:r>
             <a:r>
               <a:rPr lang="ko-KR" altLang="en-US" sz="2200" b="1" dirty="0">
@@ -27899,26 +27899,37 @@
                 <a:ea typeface="Malgun Gothic" pitchFamily="34" charset="-122"/>
                 <a:cs typeface="Malgun Gothic" pitchFamily="34" charset="-120"/>
               </a:rPr>
-              <a:t>수능  </a:t>
+              <a:t>한국은</a:t>
+            </a:r>
+            <a:r>
+              <a:rPr lang="en-US" sz="2200" b="1" dirty="0">
+                <a:solidFill>
+                  <a:srgbClr val="4236F6"/>
+                </a:solidFill>
+              </a:rPr>
+              <a:t>… </a:t>
             </a:r>
             <a:r>
               <a:rPr lang="ko-KR" altLang="en-US" sz="2200" b="1" dirty="0">
                 <a:solidFill>
-                  <a:srgbClr val="003478"/>
+                  <a:srgbClr val="4236F6"/>
                 </a:solidFill>
                 <a:latin typeface="Malgun Gothic" pitchFamily="34" charset="0"/>
                 <a:ea typeface="Malgun Gothic" pitchFamily="34" charset="-122"/>
                 <a:cs typeface="Malgun Gothic" pitchFamily="34" charset="-120"/>
               </a:rPr>
-              <a:t>Ahora en Corea… el 수능</a:t>
-            </a:r>
-            <a:r>
-              <a:rPr lang="ko-KR" altLang="en-US" sz="1500" b="1" i="1" dirty="0">
-                <a:solidFill>
-                  <a:srgbClr val="8A8DA0"/>
-                </a:solidFill>
-              </a:rPr>
-              <a:t>   Right now in Korea: the 수능</a:t>
+              <a:t>수능  </a:t>
+            </a:r>
+            <a:r>
+              <a:rPr lang="ko-KR" altLang="en-US" sz="2200" b="1" dirty="0">
+                <a:solidFill>
+                  <a:srgbClr val="003478"/>
+                </a:solidFill>
+                <a:latin typeface="Malgun Gothic" pitchFamily="34" charset="0"/>
+                <a:ea typeface="Malgun Gothic" pitchFamily="34" charset="-122"/>
+                <a:cs typeface="Malgun Gothic" pitchFamily="34" charset="-120"/>
+              </a:rPr>
+              <a:t>El jueves pasado en Corea… el 수능</a:t>
             </a:r>
             <a:endParaRPr lang="en-US" sz="3000" dirty="0"/>
           </a:p>
@@ -28134,7 +28145,7 @@
                 <a:ea typeface="Malgun Gothic" pitchFamily="34" charset="-122"/>
                 <a:cs typeface="Malgun Gothic" pitchFamily="34" charset="-120"/>
               </a:rPr>
-              <a:t>Jueves 19 · 09:00 · primera prueba: 국어 </a:t>
+              <a:t>Jueves 19 nov · 09:00 · primera prueba: 국어 </a:t>
             </a:r>
             <a:r>
               <a:rPr lang="en-US" sz="1800" dirty="0">
@@ -28297,7 +28308,7 @@
           <p:nvPr>
             <p:extLst>
               <p:ext uri="{D42A27DB-BD31-4B8C-83A1-F6EECF244321}">
-                <p14:modId xmlns:p14="http://schemas.microsoft.com/office/powerpoint/2010/main" val="647508103"/>
+                <p14:modId xmlns:p14="http://schemas.microsoft.com/office/powerpoint/2010/main" val="764247384"/>
               </p:ext>
             </p:extLst>
           </p:nvPr>
